--- a/courseware/Finance for Non-Finance Managers (C525)-v10.pptx
+++ b/courseware/Finance for Non-Finance Managers (C525)-v10.pptx
@@ -5029,7 +5029,7 @@
         <p:spPr>
           <a:xfrm>
             <a:off x="365760" y="6446520"/>
-            <a:ext cx="6858000" cy="320040"/>
+            <a:ext cx="4023360" cy="320040"/>
           </a:xfrm>
           <a:prstGeom prst="rect">
             <a:avLst/>
@@ -5054,7 +5054,7 @@
                 </a:solidFill>
                 <a:latin typeface="Arial"/>
               </a:rPr>
-              <a:t>Finance for Non-Finance Managers (C525)  ·  C525</a:t>
+              <a:t>Finance for Non-Finance Managers (C525)</a:t>
             </a:r>
           </a:p>
         </p:txBody>
@@ -5416,7 +5416,7 @@
         <p:spPr>
           <a:xfrm>
             <a:off x="365760" y="6446520"/>
-            <a:ext cx="6858000" cy="320040"/>
+            <a:ext cx="4023360" cy="320040"/>
           </a:xfrm>
           <a:prstGeom prst="rect">
             <a:avLst/>
@@ -5441,7 +5441,7 @@
                 </a:solidFill>
                 <a:latin typeface="Arial"/>
               </a:rPr>
-              <a:t>Finance for Non-Finance Managers (C525)  ·  C525</a:t>
+              <a:t>Finance for Non-Finance Managers (C525)</a:t>
             </a:r>
           </a:p>
         </p:txBody>
@@ -7120,7 +7120,7 @@
         <p:spPr>
           <a:xfrm>
             <a:off x="365760" y="6446520"/>
-            <a:ext cx="6858000" cy="320040"/>
+            <a:ext cx="4023360" cy="320040"/>
           </a:xfrm>
           <a:prstGeom prst="rect">
             <a:avLst/>
@@ -7145,7 +7145,7 @@
                 </a:solidFill>
                 <a:latin typeface="Arial"/>
               </a:rPr>
-              <a:t>Finance for Non-Finance Managers (C525)  ·  C525</a:t>
+              <a:t>Finance for Non-Finance Managers (C525)</a:t>
             </a:r>
           </a:p>
         </p:txBody>
@@ -8372,7 +8372,7 @@
         <p:spPr>
           <a:xfrm>
             <a:off x="365760" y="6446520"/>
-            <a:ext cx="6858000" cy="320040"/>
+            <a:ext cx="4023360" cy="320040"/>
           </a:xfrm>
           <a:prstGeom prst="rect">
             <a:avLst/>
@@ -8397,7 +8397,7 @@
                 </a:solidFill>
                 <a:latin typeface="Arial"/>
               </a:rPr>
-              <a:t>Finance for Non-Finance Managers (C525)  ·  C525</a:t>
+              <a:t>Finance for Non-Finance Managers (C525)</a:t>
             </a:r>
           </a:p>
         </p:txBody>
@@ -8715,7 +8715,7 @@
         <p:spPr>
           <a:xfrm>
             <a:off x="365760" y="6446520"/>
-            <a:ext cx="6858000" cy="320040"/>
+            <a:ext cx="4023360" cy="320040"/>
           </a:xfrm>
           <a:prstGeom prst="rect">
             <a:avLst/>
@@ -8740,7 +8740,7 @@
                 </a:solidFill>
                 <a:latin typeface="Arial"/>
               </a:rPr>
-              <a:t>Finance for Non-Finance Managers (C525)  ·  C525</a:t>
+              <a:t>Finance for Non-Finance Managers (C525)</a:t>
             </a:r>
           </a:p>
         </p:txBody>
@@ -9657,7 +9657,7 @@
         <p:spPr>
           <a:xfrm>
             <a:off x="365760" y="6446520"/>
-            <a:ext cx="6858000" cy="320040"/>
+            <a:ext cx="4023360" cy="320040"/>
           </a:xfrm>
           <a:prstGeom prst="rect">
             <a:avLst/>
@@ -9682,7 +9682,7 @@
                 </a:solidFill>
                 <a:latin typeface="Arial"/>
               </a:rPr>
-              <a:t>Finance for Non-Finance Managers (C525)  ·  C525</a:t>
+              <a:t>Finance for Non-Finance Managers (C525)</a:t>
             </a:r>
           </a:p>
         </p:txBody>
@@ -10845,7 +10845,7 @@
         <p:spPr>
           <a:xfrm>
             <a:off x="365760" y="6446520"/>
-            <a:ext cx="6858000" cy="320040"/>
+            <a:ext cx="4023360" cy="320040"/>
           </a:xfrm>
           <a:prstGeom prst="rect">
             <a:avLst/>
@@ -10870,7 +10870,7 @@
                 </a:solidFill>
                 <a:latin typeface="Arial"/>
               </a:rPr>
-              <a:t>Finance for Non-Finance Managers (C525)  ·  C525</a:t>
+              <a:t>Finance for Non-Finance Managers (C525)</a:t>
             </a:r>
           </a:p>
         </p:txBody>
@@ -11271,7 +11271,7 @@
         <p:spPr>
           <a:xfrm>
             <a:off x="365760" y="6446520"/>
-            <a:ext cx="6858000" cy="320040"/>
+            <a:ext cx="4023360" cy="320040"/>
           </a:xfrm>
           <a:prstGeom prst="rect">
             <a:avLst/>
@@ -11296,7 +11296,7 @@
                 </a:solidFill>
                 <a:latin typeface="Arial"/>
               </a:rPr>
-              <a:t>Finance for Non-Finance Managers (C525)  ·  C525</a:t>
+              <a:t>Finance for Non-Finance Managers (C525)</a:t>
             </a:r>
           </a:p>
         </p:txBody>
@@ -12459,7 +12459,7 @@
         <p:spPr>
           <a:xfrm>
             <a:off x="365760" y="6446520"/>
-            <a:ext cx="6858000" cy="320040"/>
+            <a:ext cx="4023360" cy="320040"/>
           </a:xfrm>
           <a:prstGeom prst="rect">
             <a:avLst/>
@@ -12484,7 +12484,7 @@
                 </a:solidFill>
                 <a:latin typeface="Arial"/>
               </a:rPr>
-              <a:t>Finance for Non-Finance Managers (C525)  ·  C525</a:t>
+              <a:t>Finance for Non-Finance Managers (C525)</a:t>
             </a:r>
           </a:p>
         </p:txBody>
@@ -13437,7 +13437,7 @@
         <p:spPr>
           <a:xfrm>
             <a:off x="365760" y="6446520"/>
-            <a:ext cx="6858000" cy="320040"/>
+            <a:ext cx="4023360" cy="320040"/>
           </a:xfrm>
           <a:prstGeom prst="rect">
             <a:avLst/>
@@ -13462,7 +13462,7 @@
                 </a:solidFill>
                 <a:latin typeface="Arial"/>
               </a:rPr>
-              <a:t>Finance for Non-Finance Managers (C525)  ·  C525</a:t>
+              <a:t>Finance for Non-Finance Managers (C525)</a:t>
             </a:r>
           </a:p>
         </p:txBody>
@@ -13824,7 +13824,7 @@
         <p:spPr>
           <a:xfrm>
             <a:off x="365760" y="6446520"/>
-            <a:ext cx="6858000" cy="320040"/>
+            <a:ext cx="4023360" cy="320040"/>
           </a:xfrm>
           <a:prstGeom prst="rect">
             <a:avLst/>
@@ -13849,7 +13849,7 @@
                 </a:solidFill>
                 <a:latin typeface="Arial"/>
               </a:rPr>
-              <a:t>Finance for Non-Finance Managers (C525)  ·  C525</a:t>
+              <a:t>Finance for Non-Finance Managers (C525)</a:t>
             </a:r>
           </a:p>
         </p:txBody>
@@ -14464,7 +14464,7 @@
         <p:spPr>
           <a:xfrm>
             <a:off x="365760" y="6446520"/>
-            <a:ext cx="6858000" cy="320040"/>
+            <a:ext cx="4023360" cy="320040"/>
           </a:xfrm>
           <a:prstGeom prst="rect">
             <a:avLst/>
@@ -14489,7 +14489,7 @@
                 </a:solidFill>
                 <a:latin typeface="Arial"/>
               </a:rPr>
-              <a:t>Finance for Non-Finance Managers (C525)  ·  C525</a:t>
+              <a:t>Finance for Non-Finance Managers (C525)</a:t>
             </a:r>
           </a:p>
         </p:txBody>
@@ -14973,7 +14973,7 @@
         <p:spPr>
           <a:xfrm>
             <a:off x="365760" y="6446520"/>
-            <a:ext cx="6858000" cy="320040"/>
+            <a:ext cx="4023360" cy="320040"/>
           </a:xfrm>
           <a:prstGeom prst="rect">
             <a:avLst/>
@@ -14998,7 +14998,7 @@
                 </a:solidFill>
                 <a:latin typeface="Arial"/>
               </a:rPr>
-              <a:t>Finance for Non-Finance Managers (C525)  ·  C525</a:t>
+              <a:t>Finance for Non-Finance Managers (C525)</a:t>
             </a:r>
           </a:p>
         </p:txBody>
@@ -15482,7 +15482,7 @@
         <p:spPr>
           <a:xfrm>
             <a:off x="365760" y="6446520"/>
-            <a:ext cx="6858000" cy="320040"/>
+            <a:ext cx="4023360" cy="320040"/>
           </a:xfrm>
           <a:prstGeom prst="rect">
             <a:avLst/>
@@ -15507,7 +15507,7 @@
                 </a:solidFill>
                 <a:latin typeface="Arial"/>
               </a:rPr>
-              <a:t>Finance for Non-Finance Managers (C525)  ·  C525</a:t>
+              <a:t>Finance for Non-Finance Managers (C525)</a:t>
             </a:r>
           </a:p>
         </p:txBody>
@@ -15991,7 +15991,7 @@
         <p:spPr>
           <a:xfrm>
             <a:off x="365760" y="6446520"/>
-            <a:ext cx="6858000" cy="320040"/>
+            <a:ext cx="4023360" cy="320040"/>
           </a:xfrm>
           <a:prstGeom prst="rect">
             <a:avLst/>
@@ -16016,7 +16016,7 @@
                 </a:solidFill>
                 <a:latin typeface="Arial"/>
               </a:rPr>
-              <a:t>Finance for Non-Finance Managers (C525)  ·  C525</a:t>
+              <a:t>Finance for Non-Finance Managers (C525)</a:t>
             </a:r>
           </a:p>
         </p:txBody>
@@ -16500,7 +16500,7 @@
         <p:spPr>
           <a:xfrm>
             <a:off x="365760" y="6446520"/>
-            <a:ext cx="6858000" cy="320040"/>
+            <a:ext cx="4023360" cy="320040"/>
           </a:xfrm>
           <a:prstGeom prst="rect">
             <a:avLst/>
@@ -16525,7 +16525,7 @@
                 </a:solidFill>
                 <a:latin typeface="Arial"/>
               </a:rPr>
-              <a:t>Finance for Non-Finance Managers (C525)  ·  C525</a:t>
+              <a:t>Finance for Non-Finance Managers (C525)</a:t>
             </a:r>
           </a:p>
         </p:txBody>
@@ -16970,7 +16970,7 @@
         <p:spPr>
           <a:xfrm>
             <a:off x="365760" y="6446520"/>
-            <a:ext cx="6858000" cy="320040"/>
+            <a:ext cx="4023360" cy="320040"/>
           </a:xfrm>
           <a:prstGeom prst="rect">
             <a:avLst/>
@@ -16995,7 +16995,7 @@
                 </a:solidFill>
                 <a:latin typeface="Arial"/>
               </a:rPr>
-              <a:t>Finance for Non-Finance Managers (C525)  ·  C525</a:t>
+              <a:t>Finance for Non-Finance Managers (C525)</a:t>
             </a:r>
           </a:p>
         </p:txBody>
@@ -17528,7 +17528,7 @@
         <p:spPr>
           <a:xfrm>
             <a:off x="365760" y="6446520"/>
-            <a:ext cx="6858000" cy="320040"/>
+            <a:ext cx="4023360" cy="320040"/>
           </a:xfrm>
           <a:prstGeom prst="rect">
             <a:avLst/>
@@ -17553,7 +17553,7 @@
                 </a:solidFill>
                 <a:latin typeface="Arial"/>
               </a:rPr>
-              <a:t>Finance for Non-Finance Managers (C525)  ·  C525</a:t>
+              <a:t>Finance for Non-Finance Managers (C525)</a:t>
             </a:r>
           </a:p>
         </p:txBody>
@@ -17954,7 +17954,7 @@
         <p:spPr>
           <a:xfrm>
             <a:off x="365760" y="6446520"/>
-            <a:ext cx="6858000" cy="320040"/>
+            <a:ext cx="4023360" cy="320040"/>
           </a:xfrm>
           <a:prstGeom prst="rect">
             <a:avLst/>
@@ -17979,7 +17979,7 @@
                 </a:solidFill>
                 <a:latin typeface="Arial"/>
               </a:rPr>
-              <a:t>Finance for Non-Finance Managers (C525)  ·  C525</a:t>
+              <a:t>Finance for Non-Finance Managers (C525)</a:t>
             </a:r>
           </a:p>
         </p:txBody>
@@ -19562,7 +19562,7 @@
         <p:spPr>
           <a:xfrm>
             <a:off x="365760" y="6446520"/>
-            <a:ext cx="6858000" cy="320040"/>
+            <a:ext cx="4023360" cy="320040"/>
           </a:xfrm>
           <a:prstGeom prst="rect">
             <a:avLst/>
@@ -19587,7 +19587,7 @@
                 </a:solidFill>
                 <a:latin typeface="Arial"/>
               </a:rPr>
-              <a:t>Finance for Non-Finance Managers (C525)  ·  C525</a:t>
+              <a:t>Finance for Non-Finance Managers (C525)</a:t>
             </a:r>
           </a:p>
         </p:txBody>
@@ -20106,7 +20106,7 @@
                 </a:solidFill>
                 <a:latin typeface="Arial"/>
               </a:rPr>
-              <a:t>Profitability ratios reflect the ability of the business to generate earnings; higher is generally more favourable.</a:t>
+              <a:t>Return on equity = Net income / Total equity — the return the owners actually receive.</a:t>
             </a:r>
           </a:p>
         </p:txBody>
@@ -20316,7 +20316,7 @@
                 </a:solidFill>
                 <a:latin typeface="Arial"/>
               </a:rPr>
-              <a:t>Gross margin = Gross profit / Net sales — what survives the direct cost of sales.</a:t>
+              <a:t>Return on assets = Net income / Total assets — how well the asset base earns.</a:t>
             </a:r>
           </a:p>
         </p:txBody>
@@ -20526,7 +20526,7 @@
                 </a:solidFill>
                 <a:latin typeface="Arial"/>
               </a:rPr>
-              <a:t>Operating margin = Operating income / Net sales — what survives running the business.</a:t>
+              <a:t>Net profit margin = Net income / Net sales — what survives interest and tax.</a:t>
             </a:r>
           </a:p>
         </p:txBody>
@@ -20736,7 +20736,7 @@
                 </a:solidFill>
                 <a:latin typeface="Arial"/>
               </a:rPr>
-              <a:t>Net profit margin = Net income / Net sales — what survives interest and tax.</a:t>
+              <a:t>Operating margin = Operating income / Net sales — what survives running the business.</a:t>
             </a:r>
           </a:p>
         </p:txBody>
@@ -20946,7 +20946,7 @@
                 </a:solidFill>
                 <a:latin typeface="Arial"/>
               </a:rPr>
-              <a:t>Return on assets = Net income / Total assets — how well the asset base earns.</a:t>
+              <a:t>Gross margin = Gross profit / Net sales — what survives the direct cost of sales.</a:t>
             </a:r>
           </a:p>
         </p:txBody>
@@ -20960,7 +20960,7 @@
         <p:spPr>
           <a:xfrm>
             <a:off x="365760" y="6446520"/>
-            <a:ext cx="6858000" cy="320040"/>
+            <a:ext cx="4023360" cy="320040"/>
           </a:xfrm>
           <a:prstGeom prst="rect">
             <a:avLst/>
@@ -20985,7 +20985,7 @@
                 </a:solidFill>
                 <a:latin typeface="Arial"/>
               </a:rPr>
-              <a:t>Finance for Non-Finance Managers (C525)  ·  C525</a:t>
+              <a:t>Finance for Non-Finance Managers (C525)</a:t>
             </a:r>
           </a:p>
         </p:txBody>
@@ -22416,7 +22416,7 @@
         <p:spPr>
           <a:xfrm>
             <a:off x="365760" y="6446520"/>
-            <a:ext cx="6858000" cy="320040"/>
+            <a:ext cx="4023360" cy="320040"/>
           </a:xfrm>
           <a:prstGeom prst="rect">
             <a:avLst/>
@@ -22441,7 +22441,7 @@
                 </a:solidFill>
                 <a:latin typeface="Arial"/>
               </a:rPr>
-              <a:t>Finance for Non-Finance Managers (C525)  ·  C525</a:t>
+              <a:t>Finance for Non-Finance Managers (C525)</a:t>
             </a:r>
           </a:p>
         </p:txBody>
@@ -22842,7 +22842,7 @@
         <p:spPr>
           <a:xfrm>
             <a:off x="365760" y="6446520"/>
-            <a:ext cx="6858000" cy="320040"/>
+            <a:ext cx="4023360" cy="320040"/>
           </a:xfrm>
           <a:prstGeom prst="rect">
             <a:avLst/>
@@ -22867,7 +22867,7 @@
                 </a:solidFill>
                 <a:latin typeface="Arial"/>
               </a:rPr>
-              <a:t>Finance for Non-Finance Managers (C525)  ·  C525</a:t>
+              <a:t>Finance for Non-Finance Managers (C525)</a:t>
             </a:r>
           </a:p>
         </p:txBody>
@@ -24240,7 +24240,7 @@
         <p:spPr>
           <a:xfrm>
             <a:off x="365760" y="6446520"/>
-            <a:ext cx="6858000" cy="320040"/>
+            <a:ext cx="4023360" cy="320040"/>
           </a:xfrm>
           <a:prstGeom prst="rect">
             <a:avLst/>
@@ -24265,7 +24265,7 @@
                 </a:solidFill>
                 <a:latin typeface="Arial"/>
               </a:rPr>
-              <a:t>Finance for Non-Finance Managers (C525)  ·  C525</a:t>
+              <a:t>Finance for Non-Finance Managers (C525)</a:t>
             </a:r>
           </a:p>
         </p:txBody>
@@ -24880,7 +24880,7 @@
         <p:spPr>
           <a:xfrm>
             <a:off x="365760" y="6446520"/>
-            <a:ext cx="6858000" cy="320040"/>
+            <a:ext cx="4023360" cy="320040"/>
           </a:xfrm>
           <a:prstGeom prst="rect">
             <a:avLst/>
@@ -24905,7 +24905,7 @@
                 </a:solidFill>
                 <a:latin typeface="Arial"/>
               </a:rPr>
-              <a:t>Finance for Non-Finance Managers (C525)  ·  C525</a:t>
+              <a:t>Finance for Non-Finance Managers (C525)</a:t>
             </a:r>
           </a:p>
         </p:txBody>
@@ -25389,7 +25389,7 @@
         <p:spPr>
           <a:xfrm>
             <a:off x="365760" y="6446520"/>
-            <a:ext cx="6858000" cy="320040"/>
+            <a:ext cx="4023360" cy="320040"/>
           </a:xfrm>
           <a:prstGeom prst="rect">
             <a:avLst/>
@@ -25414,7 +25414,7 @@
                 </a:solidFill>
                 <a:latin typeface="Arial"/>
               </a:rPr>
-              <a:t>Finance for Non-Finance Managers (C525)  ·  C525</a:t>
+              <a:t>Finance for Non-Finance Managers (C525)</a:t>
             </a:r>
           </a:p>
         </p:txBody>
@@ -25898,7 +25898,7 @@
         <p:spPr>
           <a:xfrm>
             <a:off x="365760" y="6446520"/>
-            <a:ext cx="6858000" cy="320040"/>
+            <a:ext cx="4023360" cy="320040"/>
           </a:xfrm>
           <a:prstGeom prst="rect">
             <a:avLst/>
@@ -25923,7 +25923,7 @@
                 </a:solidFill>
                 <a:latin typeface="Arial"/>
               </a:rPr>
-              <a:t>Finance for Non-Finance Managers (C525)  ·  C525</a:t>
+              <a:t>Finance for Non-Finance Managers (C525)</a:t>
             </a:r>
           </a:p>
         </p:txBody>
@@ -26407,7 +26407,7 @@
         <p:spPr>
           <a:xfrm>
             <a:off x="365760" y="6446520"/>
-            <a:ext cx="6858000" cy="320040"/>
+            <a:ext cx="4023360" cy="320040"/>
           </a:xfrm>
           <a:prstGeom prst="rect">
             <a:avLst/>
@@ -26432,7 +26432,7 @@
                 </a:solidFill>
                 <a:latin typeface="Arial"/>
               </a:rPr>
-              <a:t>Finance for Non-Finance Managers (C525)  ·  C525</a:t>
+              <a:t>Finance for Non-Finance Managers (C525)</a:t>
             </a:r>
           </a:p>
         </p:txBody>
@@ -26916,7 +26916,7 @@
         <p:spPr>
           <a:xfrm>
             <a:off x="365760" y="6446520"/>
-            <a:ext cx="6858000" cy="320040"/>
+            <a:ext cx="4023360" cy="320040"/>
           </a:xfrm>
           <a:prstGeom prst="rect">
             <a:avLst/>
@@ -26941,7 +26941,7 @@
                 </a:solidFill>
                 <a:latin typeface="Arial"/>
               </a:rPr>
-              <a:t>Finance for Non-Finance Managers (C525)  ·  C525</a:t>
+              <a:t>Finance for Non-Finance Managers (C525)</a:t>
             </a:r>
           </a:p>
         </p:txBody>
@@ -27386,7 +27386,7 @@
         <p:spPr>
           <a:xfrm>
             <a:off x="365760" y="6446520"/>
-            <a:ext cx="6858000" cy="320040"/>
+            <a:ext cx="4023360" cy="320040"/>
           </a:xfrm>
           <a:prstGeom prst="rect">
             <a:avLst/>
@@ -27411,7 +27411,7 @@
                 </a:solidFill>
                 <a:latin typeface="Arial"/>
               </a:rPr>
-              <a:t>Finance for Non-Finance Managers (C525)  ·  C525</a:t>
+              <a:t>Finance for Non-Finance Managers (C525)</a:t>
             </a:r>
           </a:p>
         </p:txBody>
@@ -27944,7 +27944,7 @@
         <p:spPr>
           <a:xfrm>
             <a:off x="365760" y="6446520"/>
-            <a:ext cx="6858000" cy="320040"/>
+            <a:ext cx="4023360" cy="320040"/>
           </a:xfrm>
           <a:prstGeom prst="rect">
             <a:avLst/>
@@ -27969,7 +27969,7 @@
                 </a:solidFill>
                 <a:latin typeface="Arial"/>
               </a:rPr>
-              <a:t>Finance for Non-Finance Managers (C525)  ·  C525</a:t>
+              <a:t>Finance for Non-Finance Managers (C525)</a:t>
             </a:r>
           </a:p>
         </p:txBody>
@@ -28370,7 +28370,7 @@
         <p:spPr>
           <a:xfrm>
             <a:off x="365760" y="6446520"/>
-            <a:ext cx="6858000" cy="320040"/>
+            <a:ext cx="4023360" cy="320040"/>
           </a:xfrm>
           <a:prstGeom prst="rect">
             <a:avLst/>
@@ -28395,7 +28395,7 @@
                 </a:solidFill>
                 <a:latin typeface="Arial"/>
               </a:rPr>
-              <a:t>Finance for Non-Finance Managers (C525)  ·  C525</a:t>
+              <a:t>Finance for Non-Finance Managers (C525)</a:t>
             </a:r>
           </a:p>
         </p:txBody>
@@ -29540,7 +29540,7 @@
         <p:spPr>
           <a:xfrm>
             <a:off x="365760" y="6446520"/>
-            <a:ext cx="6858000" cy="320040"/>
+            <a:ext cx="4023360" cy="320040"/>
           </a:xfrm>
           <a:prstGeom prst="rect">
             <a:avLst/>
@@ -29565,7 +29565,7 @@
                 </a:solidFill>
                 <a:latin typeface="Arial"/>
               </a:rPr>
-              <a:t>Finance for Non-Finance Managers (C525)  ·  C525</a:t>
+              <a:t>Finance for Non-Finance Managers (C525)</a:t>
             </a:r>
           </a:p>
         </p:txBody>
@@ -30938,7 +30938,7 @@
         <p:spPr>
           <a:xfrm>
             <a:off x="365760" y="6446520"/>
-            <a:ext cx="6858000" cy="320040"/>
+            <a:ext cx="4023360" cy="320040"/>
           </a:xfrm>
           <a:prstGeom prst="rect">
             <a:avLst/>
@@ -30963,7 +30963,7 @@
                 </a:solidFill>
                 <a:latin typeface="Arial"/>
               </a:rPr>
-              <a:t>Finance for Non-Finance Managers (C525)  ·  C525</a:t>
+              <a:t>Finance for Non-Finance Managers (C525)</a:t>
             </a:r>
           </a:p>
         </p:txBody>
@@ -31578,7 +31578,7 @@
         <p:spPr>
           <a:xfrm>
             <a:off x="365760" y="6446520"/>
-            <a:ext cx="6858000" cy="320040"/>
+            <a:ext cx="4023360" cy="320040"/>
           </a:xfrm>
           <a:prstGeom prst="rect">
             <a:avLst/>
@@ -31603,7 +31603,7 @@
                 </a:solidFill>
                 <a:latin typeface="Arial"/>
               </a:rPr>
-              <a:t>Finance for Non-Finance Managers (C525)  ·  C525</a:t>
+              <a:t>Finance for Non-Finance Managers (C525)</a:t>
             </a:r>
           </a:p>
         </p:txBody>
@@ -32087,7 +32087,7 @@
         <p:spPr>
           <a:xfrm>
             <a:off x="365760" y="6446520"/>
-            <a:ext cx="6858000" cy="320040"/>
+            <a:ext cx="4023360" cy="320040"/>
           </a:xfrm>
           <a:prstGeom prst="rect">
             <a:avLst/>
@@ -32112,7 +32112,7 @@
                 </a:solidFill>
                 <a:latin typeface="Arial"/>
               </a:rPr>
-              <a:t>Finance for Non-Finance Managers (C525)  ·  C525</a:t>
+              <a:t>Finance for Non-Finance Managers (C525)</a:t>
             </a:r>
           </a:p>
         </p:txBody>
@@ -32596,7 +32596,7 @@
         <p:spPr>
           <a:xfrm>
             <a:off x="365760" y="6446520"/>
-            <a:ext cx="6858000" cy="320040"/>
+            <a:ext cx="4023360" cy="320040"/>
           </a:xfrm>
           <a:prstGeom prst="rect">
             <a:avLst/>
@@ -32621,7 +32621,7 @@
                 </a:solidFill>
                 <a:latin typeface="Arial"/>
               </a:rPr>
-              <a:t>Finance for Non-Finance Managers (C525)  ·  C525</a:t>
+              <a:t>Finance for Non-Finance Managers (C525)</a:t>
             </a:r>
           </a:p>
         </p:txBody>
@@ -33105,7 +33105,7 @@
         <p:spPr>
           <a:xfrm>
             <a:off x="365760" y="6446520"/>
-            <a:ext cx="6858000" cy="320040"/>
+            <a:ext cx="4023360" cy="320040"/>
           </a:xfrm>
           <a:prstGeom prst="rect">
             <a:avLst/>
@@ -33130,7 +33130,7 @@
                 </a:solidFill>
                 <a:latin typeface="Arial"/>
               </a:rPr>
-              <a:t>Finance for Non-Finance Managers (C525)  ·  C525</a:t>
+              <a:t>Finance for Non-Finance Managers (C525)</a:t>
             </a:r>
           </a:p>
         </p:txBody>
@@ -33614,7 +33614,7 @@
         <p:spPr>
           <a:xfrm>
             <a:off x="365760" y="6446520"/>
-            <a:ext cx="6858000" cy="320040"/>
+            <a:ext cx="4023360" cy="320040"/>
           </a:xfrm>
           <a:prstGeom prst="rect">
             <a:avLst/>
@@ -33639,7 +33639,7 @@
                 </a:solidFill>
                 <a:latin typeface="Arial"/>
               </a:rPr>
-              <a:t>Finance for Non-Finance Managers (C525)  ·  C525</a:t>
+              <a:t>Finance for Non-Finance Managers (C525)</a:t>
             </a:r>
           </a:p>
         </p:txBody>
@@ -34084,7 +34084,7 @@
         <p:spPr>
           <a:xfrm>
             <a:off x="365760" y="6446520"/>
-            <a:ext cx="6858000" cy="320040"/>
+            <a:ext cx="4023360" cy="320040"/>
           </a:xfrm>
           <a:prstGeom prst="rect">
             <a:avLst/>
@@ -34109,7 +34109,7 @@
                 </a:solidFill>
                 <a:latin typeface="Arial"/>
               </a:rPr>
-              <a:t>Finance for Non-Finance Managers (C525)  ·  C525</a:t>
+              <a:t>Finance for Non-Finance Managers (C525)</a:t>
             </a:r>
           </a:p>
         </p:txBody>
@@ -34642,7 +34642,7 @@
         <p:spPr>
           <a:xfrm>
             <a:off x="365760" y="6446520"/>
-            <a:ext cx="6858000" cy="320040"/>
+            <a:ext cx="4023360" cy="320040"/>
           </a:xfrm>
           <a:prstGeom prst="rect">
             <a:avLst/>
@@ -34667,7 +34667,7 @@
                 </a:solidFill>
                 <a:latin typeface="Arial"/>
               </a:rPr>
-              <a:t>Finance for Non-Finance Managers (C525)  ·  C525</a:t>
+              <a:t>Finance for Non-Finance Managers (C525)</a:t>
             </a:r>
           </a:p>
         </p:txBody>
@@ -35068,7 +35068,7 @@
         <p:spPr>
           <a:xfrm>
             <a:off x="365760" y="6446520"/>
-            <a:ext cx="6858000" cy="320040"/>
+            <a:ext cx="4023360" cy="320040"/>
           </a:xfrm>
           <a:prstGeom prst="rect">
             <a:avLst/>
@@ -35093,7 +35093,7 @@
                 </a:solidFill>
                 <a:latin typeface="Arial"/>
               </a:rPr>
-              <a:t>Finance for Non-Finance Managers (C525)  ·  C525</a:t>
+              <a:t>Finance for Non-Finance Managers (C525)</a:t>
             </a:r>
           </a:p>
         </p:txBody>
@@ -36466,7 +36466,7 @@
         <p:spPr>
           <a:xfrm>
             <a:off x="365760" y="6446520"/>
-            <a:ext cx="6858000" cy="320040"/>
+            <a:ext cx="4023360" cy="320040"/>
           </a:xfrm>
           <a:prstGeom prst="rect">
             <a:avLst/>
@@ -36491,7 +36491,7 @@
                 </a:solidFill>
                 <a:latin typeface="Arial"/>
               </a:rPr>
-              <a:t>Finance for Non-Finance Managers (C525)  ·  C525</a:t>
+              <a:t>Finance for Non-Finance Managers (C525)</a:t>
             </a:r>
           </a:p>
         </p:txBody>
@@ -37444,7 +37444,7 @@
         <p:spPr>
           <a:xfrm>
             <a:off x="365760" y="6446520"/>
-            <a:ext cx="6858000" cy="320040"/>
+            <a:ext cx="4023360" cy="320040"/>
           </a:xfrm>
           <a:prstGeom prst="rect">
             <a:avLst/>
@@ -37469,7 +37469,7 @@
                 </a:solidFill>
                 <a:latin typeface="Arial"/>
               </a:rPr>
-              <a:t>Finance for Non-Finance Managers (C525)  ·  C525</a:t>
+              <a:t>Finance for Non-Finance Managers (C525)</a:t>
             </a:r>
           </a:p>
         </p:txBody>
@@ -37988,7 +37988,7 @@
                 </a:solidFill>
                 <a:latin typeface="Arial"/>
               </a:rPr>
-              <a:t>Financial statement analysis evaluates the financial situation and supports administrative and economic decisions.</a:t>
+              <a:t>Vertical analysis states every item as a percentage of a base — gross sales for the income statement, total assets for the balance sheet.</a:t>
             </a:r>
           </a:p>
         </p:txBody>
@@ -38198,7 +38198,7 @@
                 </a:solidFill>
                 <a:latin typeface="Arial"/>
               </a:rPr>
-              <a:t>There are three methods: ratio analysis, horizontal (trend) analysis and vertical (common-size) analysis.</a:t>
+              <a:t>Horizontal analysis measures the percentage change of the same line item across two or more periods.</a:t>
             </a:r>
           </a:p>
         </p:txBody>
@@ -38618,7 +38618,7 @@
                 </a:solidFill>
                 <a:latin typeface="Arial"/>
               </a:rPr>
-              <a:t>Horizontal analysis measures the percentage change of the same line item across two or more periods.</a:t>
+              <a:t>There are three methods: ratio analysis, horizontal (trend) analysis and vertical (common-size) analysis.</a:t>
             </a:r>
           </a:p>
         </p:txBody>
@@ -38828,7 +38828,7 @@
                 </a:solidFill>
                 <a:latin typeface="Arial"/>
               </a:rPr>
-              <a:t>Vertical analysis states every item as a percentage of a base — gross sales for the income statement, total assets for the balance sheet.</a:t>
+              <a:t>Financial statement analysis evaluates the financial situation and supports administrative and economic decisions.</a:t>
             </a:r>
           </a:p>
         </p:txBody>
@@ -38842,7 +38842,7 @@
         <p:spPr>
           <a:xfrm>
             <a:off x="365760" y="6446520"/>
-            <a:ext cx="6858000" cy="320040"/>
+            <a:ext cx="4023360" cy="320040"/>
           </a:xfrm>
           <a:prstGeom prst="rect">
             <a:avLst/>
@@ -38867,7 +38867,7 @@
                 </a:solidFill>
                 <a:latin typeface="Arial"/>
               </a:rPr>
-              <a:t>Finance for Non-Finance Managers (C525)  ·  C525</a:t>
+              <a:t>Finance for Non-Finance Managers (C525)</a:t>
             </a:r>
           </a:p>
         </p:txBody>
@@ -39268,7 +39268,7 @@
         <p:spPr>
           <a:xfrm>
             <a:off x="365760" y="6446520"/>
-            <a:ext cx="6858000" cy="320040"/>
+            <a:ext cx="4023360" cy="320040"/>
           </a:xfrm>
           <a:prstGeom prst="rect">
             <a:avLst/>
@@ -39293,7 +39293,7 @@
                 </a:solidFill>
                 <a:latin typeface="Arial"/>
               </a:rPr>
-              <a:t>Finance for Non-Finance Managers (C525)  ·  C525</a:t>
+              <a:t>Finance for Non-Finance Managers (C525)</a:t>
             </a:r>
           </a:p>
         </p:txBody>
@@ -40666,7 +40666,7 @@
         <p:spPr>
           <a:xfrm>
             <a:off x="365760" y="6446520"/>
-            <a:ext cx="6858000" cy="320040"/>
+            <a:ext cx="4023360" cy="320040"/>
           </a:xfrm>
           <a:prstGeom prst="rect">
             <a:avLst/>
@@ -40691,7 +40691,7 @@
                 </a:solidFill>
                 <a:latin typeface="Arial"/>
               </a:rPr>
-              <a:t>Finance for Non-Finance Managers (C525)  ·  C525</a:t>
+              <a:t>Finance for Non-Finance Managers (C525)</a:t>
             </a:r>
           </a:p>
         </p:txBody>
@@ -41210,7 +41210,7 @@
                 </a:solidFill>
                 <a:latin typeface="Arial"/>
               </a:rPr>
-              <a:t>From the balance sheet: debt relative to equity, short-term liquidity, and how long collection and payment take.</a:t>
+              <a:t>From ratios: debt-to-equity, inventory turnover, total asset turnover, ROE and ROA for efficiency and return.</a:t>
             </a:r>
           </a:p>
         </p:txBody>
@@ -41420,7 +41420,7 @@
                 </a:solidFill>
                 <a:latin typeface="Arial"/>
               </a:rPr>
-              <a:t>From the income statement: revenue growth, gross profit margin, net profit after all expenses, and interest cover.</a:t>
+              <a:t>From ratios: gross and net profit margin, coverage ratio, current and quick ratio for obligations.</a:t>
             </a:r>
           </a:p>
         </p:txBody>
@@ -41840,7 +41840,7 @@
                 </a:solidFill>
                 <a:latin typeface="Arial"/>
               </a:rPr>
-              <a:t>From ratios: gross and net profit margin, coverage ratio, current and quick ratio for obligations.</a:t>
+              <a:t>From the income statement: revenue growth, gross profit margin, net profit after all expenses, and interest cover.</a:t>
             </a:r>
           </a:p>
         </p:txBody>
@@ -42050,7 +42050,7 @@
                 </a:solidFill>
                 <a:latin typeface="Arial"/>
               </a:rPr>
-              <a:t>From ratios: debt-to-equity, inventory turnover, total asset turnover, ROE and ROA for efficiency and return.</a:t>
+              <a:t>From the balance sheet: debt relative to equity, short-term liquidity, and how long collection and payment take.</a:t>
             </a:r>
           </a:p>
         </p:txBody>
@@ -42064,7 +42064,7 @@
         <p:spPr>
           <a:xfrm>
             <a:off x="365760" y="6446520"/>
-            <a:ext cx="6858000" cy="320040"/>
+            <a:ext cx="4023360" cy="320040"/>
           </a:xfrm>
           <a:prstGeom prst="rect">
             <a:avLst/>
@@ -42089,7 +42089,7 @@
                 </a:solidFill>
                 <a:latin typeface="Arial"/>
               </a:rPr>
-              <a:t>Finance for Non-Finance Managers (C525)  ·  C525</a:t>
+              <a:t>Finance for Non-Finance Managers (C525)</a:t>
             </a:r>
           </a:p>
         </p:txBody>
@@ -42490,7 +42490,7 @@
         <p:spPr>
           <a:xfrm>
             <a:off x="365760" y="6446520"/>
-            <a:ext cx="6858000" cy="320040"/>
+            <a:ext cx="4023360" cy="320040"/>
           </a:xfrm>
           <a:prstGeom prst="rect">
             <a:avLst/>
@@ -42515,7 +42515,7 @@
                 </a:solidFill>
                 <a:latin typeface="Arial"/>
               </a:rPr>
-              <a:t>Finance for Non-Finance Managers (C525)  ·  C525</a:t>
+              <a:t>Finance for Non-Finance Managers (C525)</a:t>
             </a:r>
           </a:p>
         </p:txBody>
@@ -43888,7 +43888,7 @@
         <p:spPr>
           <a:xfrm>
             <a:off x="365760" y="6446520"/>
-            <a:ext cx="6858000" cy="320040"/>
+            <a:ext cx="4023360" cy="320040"/>
           </a:xfrm>
           <a:prstGeom prst="rect">
             <a:avLst/>
@@ -43913,7 +43913,7 @@
                 </a:solidFill>
                 <a:latin typeface="Arial"/>
               </a:rPr>
-              <a:t>Finance for Non-Finance Managers (C525)  ·  C525</a:t>
+              <a:t>Finance for Non-Finance Managers (C525)</a:t>
             </a:r>
           </a:p>
         </p:txBody>
@@ -44528,7 +44528,7 @@
         <p:spPr>
           <a:xfrm>
             <a:off x="365760" y="6446520"/>
-            <a:ext cx="6858000" cy="320040"/>
+            <a:ext cx="4023360" cy="320040"/>
           </a:xfrm>
           <a:prstGeom prst="rect">
             <a:avLst/>
@@ -44553,7 +44553,7 @@
                 </a:solidFill>
                 <a:latin typeface="Arial"/>
               </a:rPr>
-              <a:t>Finance for Non-Finance Managers (C525)  ·  C525</a:t>
+              <a:t>Finance for Non-Finance Managers (C525)</a:t>
             </a:r>
           </a:p>
         </p:txBody>
@@ -45037,7 +45037,7 @@
         <p:spPr>
           <a:xfrm>
             <a:off x="365760" y="6446520"/>
-            <a:ext cx="6858000" cy="320040"/>
+            <a:ext cx="4023360" cy="320040"/>
           </a:xfrm>
           <a:prstGeom prst="rect">
             <a:avLst/>
@@ -45062,7 +45062,7 @@
                 </a:solidFill>
                 <a:latin typeface="Arial"/>
               </a:rPr>
-              <a:t>Finance for Non-Finance Managers (C525)  ·  C525</a:t>
+              <a:t>Finance for Non-Finance Managers (C525)</a:t>
             </a:r>
           </a:p>
         </p:txBody>
@@ -45546,7 +45546,7 @@
         <p:spPr>
           <a:xfrm>
             <a:off x="365760" y="6446520"/>
-            <a:ext cx="6858000" cy="320040"/>
+            <a:ext cx="4023360" cy="320040"/>
           </a:xfrm>
           <a:prstGeom prst="rect">
             <a:avLst/>
@@ -45571,7 +45571,7 @@
                 </a:solidFill>
                 <a:latin typeface="Arial"/>
               </a:rPr>
-              <a:t>Finance for Non-Finance Managers (C525)  ·  C525</a:t>
+              <a:t>Finance for Non-Finance Managers (C525)</a:t>
             </a:r>
           </a:p>
         </p:txBody>
@@ -46055,7 +46055,7 @@
         <p:spPr>
           <a:xfrm>
             <a:off x="365760" y="6446520"/>
-            <a:ext cx="6858000" cy="320040"/>
+            <a:ext cx="4023360" cy="320040"/>
           </a:xfrm>
           <a:prstGeom prst="rect">
             <a:avLst/>
@@ -46080,7 +46080,7 @@
                 </a:solidFill>
                 <a:latin typeface="Arial"/>
               </a:rPr>
-              <a:t>Finance for Non-Finance Managers (C525)  ·  C525</a:t>
+              <a:t>Finance for Non-Finance Managers (C525)</a:t>
             </a:r>
           </a:p>
         </p:txBody>
@@ -47663,7 +47663,7 @@
         <p:spPr>
           <a:xfrm>
             <a:off x="365760" y="6446520"/>
-            <a:ext cx="6858000" cy="320040"/>
+            <a:ext cx="4023360" cy="320040"/>
           </a:xfrm>
           <a:prstGeom prst="rect">
             <a:avLst/>
@@ -47688,7 +47688,7 @@
                 </a:solidFill>
                 <a:latin typeface="Arial"/>
               </a:rPr>
-              <a:t>Finance for Non-Finance Managers (C525)  ·  C525</a:t>
+              <a:t>Finance for Non-Finance Managers (C525)</a:t>
             </a:r>
           </a:p>
         </p:txBody>
@@ -48172,7 +48172,7 @@
         <p:spPr>
           <a:xfrm>
             <a:off x="365760" y="6446520"/>
-            <a:ext cx="6858000" cy="320040"/>
+            <a:ext cx="4023360" cy="320040"/>
           </a:xfrm>
           <a:prstGeom prst="rect">
             <a:avLst/>
@@ -48197,7 +48197,7 @@
                 </a:solidFill>
                 <a:latin typeface="Arial"/>
               </a:rPr>
-              <a:t>Finance for Non-Finance Managers (C525)  ·  C525</a:t>
+              <a:t>Finance for Non-Finance Managers (C525)</a:t>
             </a:r>
           </a:p>
         </p:txBody>
@@ -48642,7 +48642,7 @@
         <p:spPr>
           <a:xfrm>
             <a:off x="365760" y="6446520"/>
-            <a:ext cx="6858000" cy="320040"/>
+            <a:ext cx="4023360" cy="320040"/>
           </a:xfrm>
           <a:prstGeom prst="rect">
             <a:avLst/>
@@ -48667,7 +48667,7 @@
                 </a:solidFill>
                 <a:latin typeface="Arial"/>
               </a:rPr>
-              <a:t>Finance for Non-Finance Managers (C525)  ·  C525</a:t>
+              <a:t>Finance for Non-Finance Managers (C525)</a:t>
             </a:r>
           </a:p>
         </p:txBody>
@@ -49200,7 +49200,7 @@
         <p:spPr>
           <a:xfrm>
             <a:off x="365760" y="6446520"/>
-            <a:ext cx="6858000" cy="320040"/>
+            <a:ext cx="4023360" cy="320040"/>
           </a:xfrm>
           <a:prstGeom prst="rect">
             <a:avLst/>
@@ -49225,7 +49225,7 @@
                 </a:solidFill>
                 <a:latin typeface="Arial"/>
               </a:rPr>
-              <a:t>Finance for Non-Finance Managers (C525)  ·  C525</a:t>
+              <a:t>Finance for Non-Finance Managers (C525)</a:t>
             </a:r>
           </a:p>
         </p:txBody>
@@ -49626,7 +49626,7 @@
         <p:spPr>
           <a:xfrm>
             <a:off x="365760" y="6446520"/>
-            <a:ext cx="6858000" cy="320040"/>
+            <a:ext cx="4023360" cy="320040"/>
           </a:xfrm>
           <a:prstGeom prst="rect">
             <a:avLst/>
@@ -49651,7 +49651,7 @@
                 </a:solidFill>
                 <a:latin typeface="Arial"/>
               </a:rPr>
-              <a:t>Finance for Non-Finance Managers (C525)  ·  C525</a:t>
+              <a:t>Finance for Non-Finance Managers (C525)</a:t>
             </a:r>
           </a:p>
         </p:txBody>
@@ -51024,7 +51024,7 @@
         <p:spPr>
           <a:xfrm>
             <a:off x="365760" y="6446520"/>
-            <a:ext cx="6858000" cy="320040"/>
+            <a:ext cx="4023360" cy="320040"/>
           </a:xfrm>
           <a:prstGeom prst="rect">
             <a:avLst/>
@@ -51049,7 +51049,7 @@
                 </a:solidFill>
                 <a:latin typeface="Arial"/>
               </a:rPr>
-              <a:t>Finance for Non-Finance Managers (C525)  ·  C525</a:t>
+              <a:t>Finance for Non-Finance Managers (C525)</a:t>
             </a:r>
           </a:p>
         </p:txBody>
@@ -51568,7 +51568,7 @@
                 </a:solidFill>
                 <a:latin typeface="Arial"/>
               </a:rPr>
-              <a:t>Revenues: assess quantity, quality and timing, revenue growth ignoring one-time items, concentration and revenue per employee.</a:t>
+              <a:t>The DuPont index decomposes ROE into Net profit margin x Asset turnover x Equity multiplier.</a:t>
             </a:r>
           </a:p>
         </p:txBody>
@@ -51778,7 +51778,7 @@
                 </a:solidFill>
                 <a:latin typeface="Arial"/>
               </a:rPr>
-              <a:t>Profits: read gross, operating and net profit margin together rather than any one alone.</a:t>
+              <a:t>Market data: price to earnings, price to book and price-earnings-growth ratios place the company against its price.</a:t>
             </a:r>
           </a:p>
         </p:txBody>
@@ -52198,7 +52198,7 @@
                 </a:solidFill>
                 <a:latin typeface="Arial"/>
               </a:rPr>
-              <a:t>Market data: price to earnings, price to book and price-earnings-growth ratios place the company against its price.</a:t>
+              <a:t>Profits: read gross, operating and net profit margin together rather than any one alone.</a:t>
             </a:r>
           </a:p>
         </p:txBody>
@@ -52408,7 +52408,7 @@
                 </a:solidFill>
                 <a:latin typeface="Arial"/>
               </a:rPr>
-              <a:t>The DuPont index decomposes ROE into Net profit margin x Asset turnover x Equity multiplier.</a:t>
+              <a:t>Revenues: assess quantity, quality and timing, revenue growth ignoring one-time items, concentration and revenue per employee.</a:t>
             </a:r>
           </a:p>
         </p:txBody>
@@ -52422,7 +52422,7 @@
         <p:spPr>
           <a:xfrm>
             <a:off x="365760" y="6446520"/>
-            <a:ext cx="6858000" cy="320040"/>
+            <a:ext cx="4023360" cy="320040"/>
           </a:xfrm>
           <a:prstGeom prst="rect">
             <a:avLst/>
@@ -52447,7 +52447,7 @@
                 </a:solidFill>
                 <a:latin typeface="Arial"/>
               </a:rPr>
-              <a:t>Finance for Non-Finance Managers (C525)  ·  C525</a:t>
+              <a:t>Finance for Non-Finance Managers (C525)</a:t>
             </a:r>
           </a:p>
         </p:txBody>
@@ -52848,7 +52848,7 @@
         <p:spPr>
           <a:xfrm>
             <a:off x="365760" y="6446520"/>
-            <a:ext cx="6858000" cy="320040"/>
+            <a:ext cx="4023360" cy="320040"/>
           </a:xfrm>
           <a:prstGeom prst="rect">
             <a:avLst/>
@@ -52873,7 +52873,7 @@
                 </a:solidFill>
                 <a:latin typeface="Arial"/>
               </a:rPr>
-              <a:t>Finance for Non-Finance Managers (C525)  ·  C525</a:t>
+              <a:t>Finance for Non-Finance Managers (C525)</a:t>
             </a:r>
           </a:p>
         </p:txBody>
@@ -54246,7 +54246,7 @@
         <p:spPr>
           <a:xfrm>
             <a:off x="365760" y="6446520"/>
-            <a:ext cx="6858000" cy="320040"/>
+            <a:ext cx="4023360" cy="320040"/>
           </a:xfrm>
           <a:prstGeom prst="rect">
             <a:avLst/>
@@ -54271,7 +54271,7 @@
                 </a:solidFill>
                 <a:latin typeface="Arial"/>
               </a:rPr>
-              <a:t>Finance for Non-Finance Managers (C525)  ·  C525</a:t>
+              <a:t>Finance for Non-Finance Managers (C525)</a:t>
             </a:r>
           </a:p>
         </p:txBody>
@@ -54790,7 +54790,7 @@
                 </a:solidFill>
                 <a:latin typeface="Arial"/>
               </a:rPr>
-              <a:t>Banking profitability: net interest margin = (Interest income - Interest expense) / Total assets.</a:t>
+              <a:t>Insurance: incurred claims ratio, commission expense ratio and claim settlement ratio describe claims performance.</a:t>
             </a:r>
           </a:p>
         </p:txBody>
@@ -55000,7 +55000,7 @@
                 </a:solidFill>
                 <a:latin typeface="Arial"/>
               </a:rPr>
-              <a:t>Banking efficiency: efficiency ratio = Non-interest expense / Revenue; operating leverage compares the two growth rates.</a:t>
+              <a:t>Insurance: persistency ratio, solvency ratio and combined ratio describe the book and its margin.</a:t>
             </a:r>
           </a:p>
         </p:txBody>
@@ -55420,7 +55420,7 @@
                 </a:solidFill>
                 <a:latin typeface="Arial"/>
               </a:rPr>
-              <a:t>Insurance: persistency ratio, solvency ratio and combined ratio describe the book and its margin.</a:t>
+              <a:t>Banking efficiency: efficiency ratio = Non-interest expense / Revenue; operating leverage compares the two growth rates.</a:t>
             </a:r>
           </a:p>
         </p:txBody>
@@ -55630,7 +55630,7 @@
                 </a:solidFill>
                 <a:latin typeface="Arial"/>
               </a:rPr>
-              <a:t>Insurance: incurred claims ratio, commission expense ratio and claim settlement ratio describe claims performance.</a:t>
+              <a:t>Banking profitability: net interest margin = (Interest income - Interest expense) / Total assets.</a:t>
             </a:r>
           </a:p>
         </p:txBody>
@@ -55644,7 +55644,7 @@
         <p:spPr>
           <a:xfrm>
             <a:off x="365760" y="6446520"/>
-            <a:ext cx="6858000" cy="320040"/>
+            <a:ext cx="4023360" cy="320040"/>
           </a:xfrm>
           <a:prstGeom prst="rect">
             <a:avLst/>
@@ -55669,7 +55669,7 @@
                 </a:solidFill>
                 <a:latin typeface="Arial"/>
               </a:rPr>
-              <a:t>Finance for Non-Finance Managers (C525)  ·  C525</a:t>
+              <a:t>Finance for Non-Finance Managers (C525)</a:t>
             </a:r>
           </a:p>
         </p:txBody>
@@ -56070,7 +56070,7 @@
         <p:spPr>
           <a:xfrm>
             <a:off x="365760" y="6446520"/>
-            <a:ext cx="6858000" cy="320040"/>
+            <a:ext cx="4023360" cy="320040"/>
           </a:xfrm>
           <a:prstGeom prst="rect">
             <a:avLst/>
@@ -56095,7 +56095,7 @@
                 </a:solidFill>
                 <a:latin typeface="Arial"/>
               </a:rPr>
-              <a:t>Finance for Non-Finance Managers (C525)  ·  C525</a:t>
+              <a:t>Finance for Non-Finance Managers (C525)</a:t>
             </a:r>
           </a:p>
         </p:txBody>
@@ -57624,7 +57624,7 @@
         <p:spPr>
           <a:xfrm>
             <a:off x="365760" y="6446520"/>
-            <a:ext cx="6858000" cy="320040"/>
+            <a:ext cx="4023360" cy="320040"/>
           </a:xfrm>
           <a:prstGeom prst="rect">
             <a:avLst/>
@@ -57649,7 +57649,7 @@
                 </a:solidFill>
                 <a:latin typeface="Arial"/>
               </a:rPr>
-              <a:t>Finance for Non-Finance Managers (C525)  ·  C525</a:t>
+              <a:t>Finance for Non-Finance Managers (C525)</a:t>
             </a:r>
           </a:p>
         </p:txBody>
@@ -58851,7 +58851,7 @@
         <p:spPr>
           <a:xfrm>
             <a:off x="365760" y="6446520"/>
-            <a:ext cx="6858000" cy="320040"/>
+            <a:ext cx="4023360" cy="320040"/>
           </a:xfrm>
           <a:prstGeom prst="rect">
             <a:avLst/>
@@ -58876,7 +58876,7 @@
                 </a:solidFill>
                 <a:latin typeface="Arial"/>
               </a:rPr>
-              <a:t>Finance for Non-Finance Managers (C525)  ·  C525</a:t>
+              <a:t>Finance for Non-Finance Managers (C525)</a:t>
             </a:r>
           </a:p>
         </p:txBody>
@@ -59395,7 +59395,7 @@
                 </a:solidFill>
                 <a:latin typeface="Arial"/>
               </a:rPr>
-              <a:t>A ratio only means something against a comparator — the same company last year, or its sector this year.</a:t>
+              <a:t>State the limitation alongside the comparison: accounting policy, scale and business mix all distort it.</a:t>
             </a:r>
           </a:p>
         </p:txBody>
@@ -59605,7 +59605,7 @@
                 </a:solidFill>
                 <a:latin typeface="Arial"/>
               </a:rPr>
-              <a:t>Sectoral averages move over time, so benchmark against the same period, not a remembered figure.</a:t>
+              <a:t>Choose comparators of similar size, business model and geography, or the comparison misleads.</a:t>
             </a:r>
           </a:p>
         </p:txBody>
@@ -59815,7 +59815,7 @@
                 </a:solidFill>
                 <a:latin typeface="Arial"/>
               </a:rPr>
-              <a:t>Choose comparators of similar size, business model and geography, or the comparison misleads.</a:t>
+              <a:t>Sectoral averages move over time, so benchmark against the same period, not a remembered figure.</a:t>
             </a:r>
           </a:p>
         </p:txBody>
@@ -60025,7 +60025,7 @@
                 </a:solidFill>
                 <a:latin typeface="Arial"/>
               </a:rPr>
-              <a:t>State the limitation alongside the comparison: accounting policy, scale and business mix all distort it.</a:t>
+              <a:t>A ratio only means something against a comparator — the same company last year, or its sector this year.</a:t>
             </a:r>
           </a:p>
         </p:txBody>
@@ -60039,7 +60039,7 @@
         <p:spPr>
           <a:xfrm>
             <a:off x="365760" y="6446520"/>
-            <a:ext cx="6858000" cy="320040"/>
+            <a:ext cx="4023360" cy="320040"/>
           </a:xfrm>
           <a:prstGeom prst="rect">
             <a:avLst/>
@@ -60064,7 +60064,7 @@
                 </a:solidFill>
                 <a:latin typeface="Arial"/>
               </a:rPr>
-              <a:t>Finance for Non-Finance Managers (C525)  ·  C525</a:t>
+              <a:t>Finance for Non-Finance Managers (C525)</a:t>
             </a:r>
           </a:p>
         </p:txBody>
@@ -60465,7 +60465,7 @@
         <p:spPr>
           <a:xfrm>
             <a:off x="365760" y="6446520"/>
-            <a:ext cx="6858000" cy="320040"/>
+            <a:ext cx="4023360" cy="320040"/>
           </a:xfrm>
           <a:prstGeom prst="rect">
             <a:avLst/>
@@ -60490,7 +60490,7 @@
                 </a:solidFill>
                 <a:latin typeface="Arial"/>
               </a:rPr>
-              <a:t>Finance for Non-Finance Managers (C525)  ·  C525</a:t>
+              <a:t>Finance for Non-Finance Managers (C525)</a:t>
             </a:r>
           </a:p>
         </p:txBody>
@@ -61653,7 +61653,7 @@
         <p:spPr>
           <a:xfrm>
             <a:off x="365760" y="6446520"/>
-            <a:ext cx="6858000" cy="320040"/>
+            <a:ext cx="4023360" cy="320040"/>
           </a:xfrm>
           <a:prstGeom prst="rect">
             <a:avLst/>
@@ -61678,7 +61678,7 @@
                 </a:solidFill>
                 <a:latin typeface="Arial"/>
               </a:rPr>
-              <a:t>Finance for Non-Finance Managers (C525)  ·  C525</a:t>
+              <a:t>Finance for Non-Finance Managers (C525)</a:t>
             </a:r>
           </a:p>
         </p:txBody>
@@ -62631,7 +62631,7 @@
         <p:spPr>
           <a:xfrm>
             <a:off x="365760" y="6446520"/>
-            <a:ext cx="6858000" cy="320040"/>
+            <a:ext cx="4023360" cy="320040"/>
           </a:xfrm>
           <a:prstGeom prst="rect">
             <a:avLst/>
@@ -62656,7 +62656,7 @@
                 </a:solidFill>
                 <a:latin typeface="Arial"/>
               </a:rPr>
-              <a:t>Finance for Non-Finance Managers (C525)  ·  C525</a:t>
+              <a:t>Finance for Non-Finance Managers (C525)</a:t>
             </a:r>
           </a:p>
         </p:txBody>
@@ -63271,7 +63271,7 @@
         <p:spPr>
           <a:xfrm>
             <a:off x="365760" y="6446520"/>
-            <a:ext cx="6858000" cy="320040"/>
+            <a:ext cx="4023360" cy="320040"/>
           </a:xfrm>
           <a:prstGeom prst="rect">
             <a:avLst/>
@@ -63296,7 +63296,7 @@
                 </a:solidFill>
                 <a:latin typeface="Arial"/>
               </a:rPr>
-              <a:t>Finance for Non-Finance Managers (C525)  ·  C525</a:t>
+              <a:t>Finance for Non-Finance Managers (C525)</a:t>
             </a:r>
           </a:p>
         </p:txBody>
@@ -63780,7 +63780,7 @@
         <p:spPr>
           <a:xfrm>
             <a:off x="365760" y="6446520"/>
-            <a:ext cx="6858000" cy="320040"/>
+            <a:ext cx="4023360" cy="320040"/>
           </a:xfrm>
           <a:prstGeom prst="rect">
             <a:avLst/>
@@ -63805,7 +63805,7 @@
                 </a:solidFill>
                 <a:latin typeface="Arial"/>
               </a:rPr>
-              <a:t>Finance for Non-Finance Managers (C525)  ·  C525</a:t>
+              <a:t>Finance for Non-Finance Managers (C525)</a:t>
             </a:r>
           </a:p>
         </p:txBody>
@@ -64289,7 +64289,7 @@
         <p:spPr>
           <a:xfrm>
             <a:off x="365760" y="6446520"/>
-            <a:ext cx="6858000" cy="320040"/>
+            <a:ext cx="4023360" cy="320040"/>
           </a:xfrm>
           <a:prstGeom prst="rect">
             <a:avLst/>
@@ -64314,7 +64314,7 @@
                 </a:solidFill>
                 <a:latin typeface="Arial"/>
               </a:rPr>
-              <a:t>Finance for Non-Finance Managers (C525)  ·  C525</a:t>
+              <a:t>Finance for Non-Finance Managers (C525)</a:t>
             </a:r>
           </a:p>
         </p:txBody>
@@ -64798,7 +64798,7 @@
         <p:spPr>
           <a:xfrm>
             <a:off x="365760" y="6446520"/>
-            <a:ext cx="6858000" cy="320040"/>
+            <a:ext cx="4023360" cy="320040"/>
           </a:xfrm>
           <a:prstGeom prst="rect">
             <a:avLst/>
@@ -64823,7 +64823,7 @@
                 </a:solidFill>
                 <a:latin typeface="Arial"/>
               </a:rPr>
-              <a:t>Finance for Non-Finance Managers (C525)  ·  C525</a:t>
+              <a:t>Finance for Non-Finance Managers (C525)</a:t>
             </a:r>
           </a:p>
         </p:txBody>
@@ -65307,7 +65307,7 @@
         <p:spPr>
           <a:xfrm>
             <a:off x="365760" y="6446520"/>
-            <a:ext cx="6858000" cy="320040"/>
+            <a:ext cx="4023360" cy="320040"/>
           </a:xfrm>
           <a:prstGeom prst="rect">
             <a:avLst/>
@@ -65332,7 +65332,7 @@
                 </a:solidFill>
                 <a:latin typeface="Arial"/>
               </a:rPr>
-              <a:t>Finance for Non-Finance Managers (C525)  ·  C525</a:t>
+              <a:t>Finance for Non-Finance Managers (C525)</a:t>
             </a:r>
           </a:p>
         </p:txBody>
@@ -65943,7 +65943,7 @@
               </a:spcAft>
             </a:pPr>
             <a:r>
-              <a:rPr sz="1600" b="0">
+              <a:rPr sz="1100" b="0">
                 <a:solidFill>
                   <a:srgbClr val="161B26"/>
                 </a:solidFill>
@@ -65959,7 +65959,7 @@
               </a:spcAft>
             </a:pPr>
             <a:r>
-              <a:rPr sz="1400" b="0">
+              <a:rPr sz="900" b="0">
                 <a:solidFill>
                   <a:srgbClr val="5B6372"/>
                 </a:solidFill>
@@ -65975,7 +65975,7 @@
               </a:spcAft>
             </a:pPr>
             <a:r>
-              <a:rPr sz="1400" b="0">
+              <a:rPr sz="900" b="0">
                 <a:solidFill>
                   <a:srgbClr val="5B6372"/>
                 </a:solidFill>
@@ -65991,7 +65991,7 @@
               </a:spcAft>
             </a:pPr>
             <a:r>
-              <a:rPr sz="1400" b="0">
+              <a:rPr sz="900" b="0">
                 <a:solidFill>
                   <a:srgbClr val="5B6372"/>
                 </a:solidFill>
@@ -66007,7 +66007,7 @@
               </a:spcAft>
             </a:pPr>
             <a:r>
-              <a:rPr sz="1400" b="0">
+              <a:rPr sz="900" b="0">
                 <a:solidFill>
                   <a:srgbClr val="5B6372"/>
                 </a:solidFill>
@@ -66023,7 +66023,7 @@
               </a:spcAft>
             </a:pPr>
             <a:r>
-              <a:rPr sz="1400" b="0">
+              <a:rPr sz="900" b="0">
                 <a:solidFill>
                   <a:srgbClr val="5B6372"/>
                 </a:solidFill>
@@ -66039,7 +66039,7 @@
               </a:spcAft>
             </a:pPr>
             <a:r>
-              <a:rPr sz="1400" b="0">
+              <a:rPr sz="900" b="0">
                 <a:solidFill>
                   <a:srgbClr val="5B6372"/>
                 </a:solidFill>
@@ -66055,7 +66055,7 @@
               </a:spcAft>
             </a:pPr>
             <a:r>
-              <a:rPr sz="1400" b="0">
+              <a:rPr sz="900" b="0">
                 <a:solidFill>
                   <a:srgbClr val="5B6372"/>
                 </a:solidFill>
@@ -66071,7 +66071,7 @@
               </a:spcAft>
             </a:pPr>
             <a:r>
-              <a:rPr sz="1600" b="0">
+              <a:rPr sz="1100" b="0">
                 <a:solidFill>
                   <a:srgbClr val="161B26"/>
                 </a:solidFill>
@@ -66087,13 +66087,13 @@
               </a:spcAft>
             </a:pPr>
             <a:r>
-              <a:rPr sz="1400" b="0">
+              <a:rPr sz="900" b="0">
                 <a:solidFill>
                   <a:srgbClr val="5B6372"/>
                 </a:solidFill>
                 <a:latin typeface="Arial"/>
               </a:rPr>
-              <a:t>–  9:30am–6:30pm · 1-hour lunch · tea breaks within training time</a:t>
+              <a:t>–  9:30am–5:30pm · 7.5 instructional hours · 30-minute lunch</a:t>
             </a:r>
           </a:p>
         </p:txBody>
@@ -66107,7 +66107,7 @@
         <p:spPr>
           <a:xfrm>
             <a:off x="365760" y="6446520"/>
-            <a:ext cx="6858000" cy="320040"/>
+            <a:ext cx="4023360" cy="320040"/>
           </a:xfrm>
           <a:prstGeom prst="rect">
             <a:avLst/>
@@ -66132,7 +66132,7 @@
                 </a:solidFill>
                 <a:latin typeface="Arial"/>
               </a:rPr>
-              <a:t>Finance for Non-Finance Managers (C525)  ·  C525</a:t>
+              <a:t>Finance for Non-Finance Managers (C525)</a:t>
             </a:r>
           </a:p>
         </p:txBody>
@@ -66577,7 +66577,7 @@
         <p:spPr>
           <a:xfrm>
             <a:off x="365760" y="6446520"/>
-            <a:ext cx="6858000" cy="320040"/>
+            <a:ext cx="4023360" cy="320040"/>
           </a:xfrm>
           <a:prstGeom prst="rect">
             <a:avLst/>
@@ -66602,7 +66602,7 @@
                 </a:solidFill>
                 <a:latin typeface="Arial"/>
               </a:rPr>
-              <a:t>Finance for Non-Finance Managers (C525)  ·  C525</a:t>
+              <a:t>Finance for Non-Finance Managers (C525)</a:t>
             </a:r>
           </a:p>
         </p:txBody>
@@ -67135,7 +67135,7 @@
         <p:spPr>
           <a:xfrm>
             <a:off x="365760" y="6446520"/>
-            <a:ext cx="6858000" cy="320040"/>
+            <a:ext cx="4023360" cy="320040"/>
           </a:xfrm>
           <a:prstGeom prst="rect">
             <a:avLst/>
@@ -67160,7 +67160,7 @@
                 </a:solidFill>
                 <a:latin typeface="Arial"/>
               </a:rPr>
-              <a:t>Finance for Non-Finance Managers (C525)  ·  C525</a:t>
+              <a:t>Finance for Non-Finance Managers (C525)</a:t>
             </a:r>
           </a:p>
         </p:txBody>
@@ -67522,7 +67522,7 @@
         <p:spPr>
           <a:xfrm>
             <a:off x="365760" y="6446520"/>
-            <a:ext cx="6858000" cy="320040"/>
+            <a:ext cx="4023360" cy="320040"/>
           </a:xfrm>
           <a:prstGeom prst="rect">
             <a:avLst/>
@@ -67547,7 +67547,7 @@
                 </a:solidFill>
                 <a:latin typeface="Arial"/>
               </a:rPr>
-              <a:t>Finance for Non-Finance Managers (C525)  ·  C525</a:t>
+              <a:t>Finance for Non-Finance Managers (C525)</a:t>
             </a:r>
           </a:p>
         </p:txBody>
@@ -68774,7 +68774,7 @@
         <p:spPr>
           <a:xfrm>
             <a:off x="365760" y="6446520"/>
-            <a:ext cx="6858000" cy="320040"/>
+            <a:ext cx="4023360" cy="320040"/>
           </a:xfrm>
           <a:prstGeom prst="rect">
             <a:avLst/>
@@ -68799,7 +68799,7 @@
                 </a:solidFill>
                 <a:latin typeface="Arial"/>
               </a:rPr>
-              <a:t>Finance for Non-Finance Managers (C525)  ·  C525</a:t>
+              <a:t>Finance for Non-Finance Managers (C525)</a:t>
             </a:r>
           </a:p>
         </p:txBody>
@@ -69962,7 +69962,7 @@
         <p:spPr>
           <a:xfrm>
             <a:off x="365760" y="6446520"/>
-            <a:ext cx="6858000" cy="320040"/>
+            <a:ext cx="4023360" cy="320040"/>
           </a:xfrm>
           <a:prstGeom prst="rect">
             <a:avLst/>
@@ -69987,7 +69987,7 @@
                 </a:solidFill>
                 <a:latin typeface="Arial"/>
               </a:rPr>
-              <a:t>Finance for Non-Finance Managers (C525)  ·  C525</a:t>
+              <a:t>Finance for Non-Finance Managers (C525)</a:t>
             </a:r>
           </a:p>
         </p:txBody>
@@ -70305,7 +70305,7 @@
         <p:spPr>
           <a:xfrm>
             <a:off x="365760" y="6446520"/>
-            <a:ext cx="6858000" cy="320040"/>
+            <a:ext cx="4023360" cy="320040"/>
           </a:xfrm>
           <a:prstGeom prst="rect">
             <a:avLst/>
@@ -70330,7 +70330,7 @@
                 </a:solidFill>
                 <a:latin typeface="Arial"/>
               </a:rPr>
-              <a:t>Finance for Non-Finance Managers (C525)  ·  C525</a:t>
+              <a:t>Finance for Non-Finance Managers (C525)</a:t>
             </a:r>
           </a:p>
         </p:txBody>
@@ -71557,7 +71557,7 @@
         <p:spPr>
           <a:xfrm>
             <a:off x="365760" y="6446520"/>
-            <a:ext cx="6858000" cy="320040"/>
+            <a:ext cx="4023360" cy="320040"/>
           </a:xfrm>
           <a:prstGeom prst="rect">
             <a:avLst/>
@@ -71582,7 +71582,7 @@
                 </a:solidFill>
                 <a:latin typeface="Arial"/>
               </a:rPr>
-              <a:t>Finance for Non-Finance Managers (C525)  ·  C525</a:t>
+              <a:t>Finance for Non-Finance Managers (C525)</a:t>
             </a:r>
           </a:p>
         </p:txBody>
